--- a/Mapped Curriculum Lessons/Grade 8/Lesson 36 - School Club Manager/School Club Manager - Slides.pptx
+++ b/Mapped Curriculum Lessons/Grade 8/Lesson 36 - School Club Manager/School Club Manager - Slides.pptx
@@ -2,24 +2,24 @@
 <file path=ppt/presentation.xml><?xml version="1.0" encoding="utf-8"?>
 <p:presentation xmlns:p="http://schemas.openxmlformats.org/presentationml/2006/main" embedTrueTypeFonts="1" saveSubsetFonts="0">
   <p:sldMasterIdLst>
-    <p:sldMasterId xmlns:r="http://schemas.openxmlformats.org/officeDocument/2006/relationships" id="2147483648" r:id="R57062b29f5084a2e"/>
+    <p:sldMasterId xmlns:r="http://schemas.openxmlformats.org/officeDocument/2006/relationships" id="2147483648" r:id="Rf316024e4c774835"/>
   </p:sldMasterIdLst>
   <p:notesMasterIdLst>
-    <p:notesMasterId xmlns:r="http://schemas.openxmlformats.org/officeDocument/2006/relationships" r:id="R8e6f2df5576a4f11"/>
+    <p:notesMasterId xmlns:r="http://schemas.openxmlformats.org/officeDocument/2006/relationships" r:id="R646ad5452d384e9b"/>
   </p:notesMasterIdLst>
   <p:sldIdLst>
-    <p:sldId xmlns:r="http://schemas.openxmlformats.org/officeDocument/2006/relationships" id="256" r:id="R67f3863baf564ecd"/>
-    <p:sldId xmlns:r="http://schemas.openxmlformats.org/officeDocument/2006/relationships" id="257" r:id="R85dbe5dd6b644936"/>
-    <p:sldId xmlns:r="http://schemas.openxmlformats.org/officeDocument/2006/relationships" id="258" r:id="Rc1e2447372074dc2"/>
-    <p:sldId xmlns:r="http://schemas.openxmlformats.org/officeDocument/2006/relationships" id="259" r:id="R10fd333979574b9d"/>
-    <p:sldId xmlns:r="http://schemas.openxmlformats.org/officeDocument/2006/relationships" id="260" r:id="R5b25244c10ab4138"/>
+    <p:sldId xmlns:r="http://schemas.openxmlformats.org/officeDocument/2006/relationships" id="256" r:id="R8830766229134729"/>
+    <p:sldId xmlns:r="http://schemas.openxmlformats.org/officeDocument/2006/relationships" id="257" r:id="R699f35efcec74205"/>
+    <p:sldId xmlns:r="http://schemas.openxmlformats.org/officeDocument/2006/relationships" id="258" r:id="R01f573cf41fe4acc"/>
+    <p:sldId xmlns:r="http://schemas.openxmlformats.org/officeDocument/2006/relationships" id="259" r:id="R22f1fb60bd374635"/>
+    <p:sldId xmlns:r="http://schemas.openxmlformats.org/officeDocument/2006/relationships" id="260" r:id="R4885a8fe407b48ba"/>
   </p:sldIdLst>
   <p:sldSz cx="12192000" cy="6858000"/>
   <p:notesSz cx="6858000" cy="9144000"/>
   <p:embeddedFontLst>
     <p:embeddedFont>
       <p:font typeface="JetBrains Mono"/>
-      <p:regular xmlns:r="http://schemas.openxmlformats.org/officeDocument/2006/relationships" r:id="R29cc587634014ed9"/>
+      <p:regular xmlns:r="http://schemas.openxmlformats.org/officeDocument/2006/relationships" r:id="R615b236da2374553"/>
     </p:embeddedFont>
   </p:embeddedFontLst>
 </p:presentation>
@@ -1052,7 +1052,7 @@
           <p:nvPr/>
         </p:nvPicPr>
         <p:blipFill rotWithShape="1">
-          <a:blip xmlns:r="http://schemas.openxmlformats.org/officeDocument/2006/relationships" xmlns:a="http://schemas.openxmlformats.org/drawingml/2006/main" r:embed="Rdff205b0cb4248e0"/>
+          <a:blip xmlns:r="http://schemas.openxmlformats.org/officeDocument/2006/relationships" xmlns:a="http://schemas.openxmlformats.org/drawingml/2006/main" r:embed="R6cff7ff816064e49"/>
           <a:stretch xmlns:a="http://schemas.openxmlformats.org/drawingml/2006/main"/>
         </p:blipFill>
         <p:spPr>
@@ -1253,7 +1253,7 @@
           <p:nvPr/>
         </p:nvPicPr>
         <p:blipFill rotWithShape="1">
-          <a:blip xmlns:r="http://schemas.openxmlformats.org/officeDocument/2006/relationships" xmlns:a="http://schemas.openxmlformats.org/drawingml/2006/main" r:embed="R0bff12678e8447a2">
+          <a:blip xmlns:r="http://schemas.openxmlformats.org/officeDocument/2006/relationships" xmlns:a="http://schemas.openxmlformats.org/drawingml/2006/main" r:embed="R24875b22103f457d">
             <a:alphaModFix amt="28000"/>
           </a:blip>
           <a:stretch xmlns:a="http://schemas.openxmlformats.org/drawingml/2006/main"/>
@@ -1466,7 +1466,7 @@
           <p:nvPr/>
         </p:nvPicPr>
         <p:blipFill rotWithShape="1">
-          <a:blip xmlns:r="http://schemas.openxmlformats.org/officeDocument/2006/relationships" xmlns:a="http://schemas.openxmlformats.org/drawingml/2006/main" r:embed="R1665c1d45d984e07">
+          <a:blip xmlns:r="http://schemas.openxmlformats.org/officeDocument/2006/relationships" xmlns:a="http://schemas.openxmlformats.org/drawingml/2006/main" r:embed="R330e5ac1e93c472d">
             <a:alphaModFix amt="28000"/>
           </a:blip>
           <a:stretch xmlns:a="http://schemas.openxmlformats.org/drawingml/2006/main"/>
@@ -1701,7 +1701,7 @@
           <p:nvPr/>
         </p:nvPicPr>
         <p:blipFill rotWithShape="1">
-          <a:blip xmlns:r="http://schemas.openxmlformats.org/officeDocument/2006/relationships" xmlns:a="http://schemas.openxmlformats.org/drawingml/2006/main" r:embed="Ra2d9c0b0c69444f3">
+          <a:blip xmlns:r="http://schemas.openxmlformats.org/officeDocument/2006/relationships" xmlns:a="http://schemas.openxmlformats.org/drawingml/2006/main" r:embed="Re6c753b9d6e54d3f">
             <a:alphaModFix amt="28000"/>
           </a:blip>
           <a:stretch xmlns:a="http://schemas.openxmlformats.org/drawingml/2006/main"/>
@@ -1978,7 +1978,7 @@
           <p:nvPr/>
         </p:nvPicPr>
         <p:blipFill rotWithShape="1">
-          <a:blip xmlns:r="http://schemas.openxmlformats.org/officeDocument/2006/relationships" xmlns:a="http://schemas.openxmlformats.org/drawingml/2006/main" r:embed="Rb77ec125f04d4f53">
+          <a:blip xmlns:r="http://schemas.openxmlformats.org/officeDocument/2006/relationships" xmlns:a="http://schemas.openxmlformats.org/drawingml/2006/main" r:embed="R53ad0b9a22b14eb9">
             <a:alphaModFix amt="28000"/>
           </a:blip>
           <a:stretch xmlns:a="http://schemas.openxmlformats.org/drawingml/2006/main"/>
@@ -2253,7 +2253,7 @@
           <p:nvPr/>
         </p:nvPicPr>
         <p:blipFill rotWithShape="1">
-          <a:blip xmlns:r="http://schemas.openxmlformats.org/officeDocument/2006/relationships" xmlns:a="http://schemas.openxmlformats.org/drawingml/2006/main" r:embed="R2a54d11491ba4b91">
+          <a:blip xmlns:r="http://schemas.openxmlformats.org/officeDocument/2006/relationships" xmlns:a="http://schemas.openxmlformats.org/drawingml/2006/main" r:embed="R5dc64f82dbce4eef">
             <a:alphaModFix amt="28000"/>
           </a:blip>
           <a:stretch xmlns:a="http://schemas.openxmlformats.org/drawingml/2006/main"/>
@@ -2677,7 +2677,7 @@
           <p:nvPr/>
         </p:nvPicPr>
         <p:blipFill rotWithShape="1">
-          <a:blip xmlns:r="http://schemas.openxmlformats.org/officeDocument/2006/relationships" xmlns:a="http://schemas.openxmlformats.org/drawingml/2006/main" r:embed="R62713f0faca8477b">
+          <a:blip xmlns:r="http://schemas.openxmlformats.org/officeDocument/2006/relationships" xmlns:a="http://schemas.openxmlformats.org/drawingml/2006/main" r:embed="R1344e1ce8abd4546">
             <a:alphaModFix amt="28000"/>
           </a:blip>
           <a:stretch xmlns:a="http://schemas.openxmlformats.org/drawingml/2006/main"/>
@@ -2818,7 +2818,7 @@
           <p:nvPr/>
         </p:nvPicPr>
         <p:blipFill rotWithShape="1">
-          <a:blip xmlns:r="http://schemas.openxmlformats.org/officeDocument/2006/relationships" xmlns:a="http://schemas.openxmlformats.org/drawingml/2006/main" r:embed="R310780fbaa7749a2">
+          <a:blip xmlns:r="http://schemas.openxmlformats.org/officeDocument/2006/relationships" xmlns:a="http://schemas.openxmlformats.org/drawingml/2006/main" r:embed="Re154be8560ea439e">
             <a:alphaModFix amt="28000"/>
           </a:blip>
           <a:stretch xmlns:a="http://schemas.openxmlformats.org/drawingml/2006/main"/>
@@ -2932,7 +2932,7 @@
           <p:nvPr/>
         </p:nvPicPr>
         <p:blipFill rotWithShape="1">
-          <a:blip xmlns:r="http://schemas.openxmlformats.org/officeDocument/2006/relationships" xmlns:a="http://schemas.openxmlformats.org/drawingml/2006/main" r:embed="Ra6579fcd431947f1">
+          <a:blip xmlns:r="http://schemas.openxmlformats.org/officeDocument/2006/relationships" xmlns:a="http://schemas.openxmlformats.org/drawingml/2006/main" r:embed="Rac009d54a0fe4b32">
             <a:alphaModFix amt="28000"/>
           </a:blip>
           <a:stretch xmlns:a="http://schemas.openxmlformats.org/drawingml/2006/main"/>
@@ -3259,7 +3259,7 @@
           <p:nvPr/>
         </p:nvPicPr>
         <p:blipFill rotWithShape="1">
-          <a:blip xmlns:r="http://schemas.openxmlformats.org/officeDocument/2006/relationships" xmlns:a="http://schemas.openxmlformats.org/drawingml/2006/main" r:embed="R866c8b1495e84e0d">
+          <a:blip xmlns:r="http://schemas.openxmlformats.org/officeDocument/2006/relationships" xmlns:a="http://schemas.openxmlformats.org/drawingml/2006/main" r:embed="R26d84e668988442d">
             <a:alphaModFix amt="28000"/>
           </a:blip>
           <a:stretch xmlns:a="http://schemas.openxmlformats.org/drawingml/2006/main"/>
@@ -3547,7 +3547,7 @@
           <p:nvPr/>
         </p:nvPicPr>
         <p:blipFill rotWithShape="1">
-          <a:blip xmlns:r="http://schemas.openxmlformats.org/officeDocument/2006/relationships" xmlns:a="http://schemas.openxmlformats.org/drawingml/2006/main" r:embed="R090e2723eb144264">
+          <a:blip xmlns:r="http://schemas.openxmlformats.org/officeDocument/2006/relationships" xmlns:a="http://schemas.openxmlformats.org/drawingml/2006/main" r:embed="R1186e2351f86442a">
             <a:alphaModFix amt="28000"/>
           </a:blip>
           <a:stretch xmlns:a="http://schemas.openxmlformats.org/drawingml/2006/main"/>
@@ -3784,17 +3784,17 @@
   </p:cSld>
   <p:clrMap bg1="lt1" tx1="dk1" bg2="lt2" tx2="dk2" accent1="accent1" accent2="accent2" accent3="accent3" accent4="accent4" accent5="accent5" accent6="accent6" hlink="hlink" folHlink="folHlink"/>
   <p:sldLayoutIdLst>
-    <p:sldLayoutId xmlns:r="http://schemas.openxmlformats.org/officeDocument/2006/relationships" id="2147483649" r:id="R5bfb70030ccd481d"/>
-    <p:sldLayoutId xmlns:r="http://schemas.openxmlformats.org/officeDocument/2006/relationships" id="2147483650" r:id="R0faad22bb36649b0"/>
-    <p:sldLayoutId xmlns:r="http://schemas.openxmlformats.org/officeDocument/2006/relationships" id="2147483651" r:id="R27c454108a644ce8"/>
-    <p:sldLayoutId xmlns:r="http://schemas.openxmlformats.org/officeDocument/2006/relationships" id="2147483652" r:id="R3ae5d18d9a3748d7"/>
-    <p:sldLayoutId xmlns:r="http://schemas.openxmlformats.org/officeDocument/2006/relationships" id="2147483653" r:id="Rdba6fcfee1e34bb1"/>
-    <p:sldLayoutId xmlns:r="http://schemas.openxmlformats.org/officeDocument/2006/relationships" id="2147483654" r:id="R4eba57d94fbc44e9"/>
-    <p:sldLayoutId xmlns:r="http://schemas.openxmlformats.org/officeDocument/2006/relationships" id="2147483655" r:id="R1331a4549ccc4ea9"/>
-    <p:sldLayoutId xmlns:r="http://schemas.openxmlformats.org/officeDocument/2006/relationships" id="2147483656" r:id="R7801c905220d445a"/>
-    <p:sldLayoutId xmlns:r="http://schemas.openxmlformats.org/officeDocument/2006/relationships" id="2147483657" r:id="R15b52824d11a4c7e"/>
-    <p:sldLayoutId xmlns:r="http://schemas.openxmlformats.org/officeDocument/2006/relationships" id="2147483658" r:id="R2cfc43794787457c"/>
-    <p:sldLayoutId xmlns:r="http://schemas.openxmlformats.org/officeDocument/2006/relationships" id="2147483659" r:id="Re7a4997abf294a94"/>
+    <p:sldLayoutId xmlns:r="http://schemas.openxmlformats.org/officeDocument/2006/relationships" id="2147483649" r:id="R7ef10cfc814241f7"/>
+    <p:sldLayoutId xmlns:r="http://schemas.openxmlformats.org/officeDocument/2006/relationships" id="2147483650" r:id="R6ff25ccad3b4467a"/>
+    <p:sldLayoutId xmlns:r="http://schemas.openxmlformats.org/officeDocument/2006/relationships" id="2147483651" r:id="R1a6ca81969894185"/>
+    <p:sldLayoutId xmlns:r="http://schemas.openxmlformats.org/officeDocument/2006/relationships" id="2147483652" r:id="R074cb520c19f4327"/>
+    <p:sldLayoutId xmlns:r="http://schemas.openxmlformats.org/officeDocument/2006/relationships" id="2147483653" r:id="Ra21a9eea44de46eb"/>
+    <p:sldLayoutId xmlns:r="http://schemas.openxmlformats.org/officeDocument/2006/relationships" id="2147483654" r:id="R5cb93a8541ce4711"/>
+    <p:sldLayoutId xmlns:r="http://schemas.openxmlformats.org/officeDocument/2006/relationships" id="2147483655" r:id="R723872d3794b4b9c"/>
+    <p:sldLayoutId xmlns:r="http://schemas.openxmlformats.org/officeDocument/2006/relationships" id="2147483656" r:id="R8150d5a36aad4c6b"/>
+    <p:sldLayoutId xmlns:r="http://schemas.openxmlformats.org/officeDocument/2006/relationships" id="2147483657" r:id="Rd1f7a8288cfa4dff"/>
+    <p:sldLayoutId xmlns:r="http://schemas.openxmlformats.org/officeDocument/2006/relationships" id="2147483658" r:id="R1d2a0c9cb02b4f1c"/>
+    <p:sldLayoutId xmlns:r="http://schemas.openxmlformats.org/officeDocument/2006/relationships" id="2147483659" r:id="R95cd3508c75b4c0c"/>
   </p:sldLayoutIdLst>
   <p:hf hdr="0" ftr="0" dt="0"/>
   <p:txStyles>
@@ -5284,7 +5284,7 @@
             <a:r>
               <a:rPr sz="1550" b="0">
                 <a:solidFill>
-                  <a:srgbClr val="1750EB"/>
+                  <a:srgbClr val="C45E00"/>
                 </a:solidFill>
                 <a:latin typeface="JetBrains Mono"/>
                 <a:ea typeface="JetBrains Mono"/>
@@ -5306,7 +5306,7 @@
             <a:r>
               <a:rPr sz="1550" b="0">
                 <a:solidFill>
-                  <a:srgbClr val="1750EB"/>
+                  <a:srgbClr val="C45E00"/>
                 </a:solidFill>
                 <a:latin typeface="JetBrains Mono"/>
                 <a:ea typeface="JetBrains Mono"/>
@@ -5752,7 +5752,7 @@
             <a:r>
               <a:rPr sz="1550" b="0">
                 <a:solidFill>
-                  <a:srgbClr val="1750EB"/>
+                  <a:srgbClr val="C45E00"/>
                 </a:solidFill>
                 <a:latin typeface="JetBrains Mono"/>
                 <a:ea typeface="JetBrains Mono"/>
@@ -5774,7 +5774,7 @@
             <a:r>
               <a:rPr sz="1550" b="0">
                 <a:solidFill>
-                  <a:srgbClr val="1750EB"/>
+                  <a:srgbClr val="C45E00"/>
                 </a:solidFill>
                 <a:latin typeface="JetBrains Mono"/>
                 <a:ea typeface="JetBrains Mono"/>
@@ -5796,7 +5796,7 @@
             <a:r>
               <a:rPr sz="1550" b="0">
                 <a:solidFill>
-                  <a:srgbClr val="1750EB"/>
+                  <a:srgbClr val="C45E00"/>
                 </a:solidFill>
                 <a:latin typeface="JetBrains Mono"/>
                 <a:ea typeface="JetBrains Mono"/>
@@ -5818,7 +5818,7 @@
             <a:r>
               <a:rPr sz="1550" b="0">
                 <a:solidFill>
-                  <a:srgbClr val="1750EB"/>
+                  <a:srgbClr val="C45E00"/>
                 </a:solidFill>
                 <a:latin typeface="JetBrains Mono"/>
                 <a:ea typeface="JetBrains Mono"/>
@@ -6157,7 +6157,7 @@
             <a:r>
               <a:rPr sz="1550" b="0">
                 <a:solidFill>
-                  <a:srgbClr val="1750EB"/>
+                  <a:srgbClr val="C45E00"/>
                 </a:solidFill>
                 <a:latin typeface="JetBrains Mono"/>
                 <a:ea typeface="JetBrains Mono"/>
@@ -6204,7 +6204,7 @@
             <a:r>
               <a:rPr sz="1550" b="0">
                 <a:solidFill>
-                  <a:srgbClr val="1750EB"/>
+                  <a:srgbClr val="C45E00"/>
                 </a:solidFill>
                 <a:latin typeface="JetBrains Mono"/>
                 <a:ea typeface="JetBrains Mono"/>
@@ -6308,7 +6308,7 @@
             <a:r>
               <a:rPr sz="1550" b="0">
                 <a:solidFill>
-                  <a:srgbClr val="1750EB"/>
+                  <a:srgbClr val="C45E00"/>
                 </a:solidFill>
                 <a:latin typeface="JetBrains Mono"/>
                 <a:ea typeface="JetBrains Mono"/>
@@ -6355,7 +6355,7 @@
             <a:r>
               <a:rPr sz="1550" b="0">
                 <a:solidFill>
-                  <a:srgbClr val="1750EB"/>
+                  <a:srgbClr val="C45E00"/>
                 </a:solidFill>
                 <a:latin typeface="JetBrains Mono"/>
                 <a:ea typeface="JetBrains Mono"/>

--- a/Mapped Curriculum Lessons/Grade 8/Lesson 36 - School Club Manager/School Club Manager - Slides.pptx
+++ b/Mapped Curriculum Lessons/Grade 8/Lesson 36 - School Club Manager/School Club Manager - Slides.pptx
@@ -2,24 +2,24 @@
 <file path=ppt/presentation.xml><?xml version="1.0" encoding="utf-8"?>
 <p:presentation xmlns:p="http://schemas.openxmlformats.org/presentationml/2006/main" embedTrueTypeFonts="1" saveSubsetFonts="0">
   <p:sldMasterIdLst>
-    <p:sldMasterId xmlns:r="http://schemas.openxmlformats.org/officeDocument/2006/relationships" id="2147483648" r:id="Rf316024e4c774835"/>
+    <p:sldMasterId xmlns:r="http://schemas.openxmlformats.org/officeDocument/2006/relationships" id="2147483648" r:id="R338faf933ae546b4"/>
   </p:sldMasterIdLst>
   <p:notesMasterIdLst>
-    <p:notesMasterId xmlns:r="http://schemas.openxmlformats.org/officeDocument/2006/relationships" r:id="R646ad5452d384e9b"/>
+    <p:notesMasterId xmlns:r="http://schemas.openxmlformats.org/officeDocument/2006/relationships" r:id="R0cd9905323bb4c8f"/>
   </p:notesMasterIdLst>
   <p:sldIdLst>
-    <p:sldId xmlns:r="http://schemas.openxmlformats.org/officeDocument/2006/relationships" id="256" r:id="R8830766229134729"/>
-    <p:sldId xmlns:r="http://schemas.openxmlformats.org/officeDocument/2006/relationships" id="257" r:id="R699f35efcec74205"/>
-    <p:sldId xmlns:r="http://schemas.openxmlformats.org/officeDocument/2006/relationships" id="258" r:id="R01f573cf41fe4acc"/>
-    <p:sldId xmlns:r="http://schemas.openxmlformats.org/officeDocument/2006/relationships" id="259" r:id="R22f1fb60bd374635"/>
-    <p:sldId xmlns:r="http://schemas.openxmlformats.org/officeDocument/2006/relationships" id="260" r:id="R4885a8fe407b48ba"/>
+    <p:sldId xmlns:r="http://schemas.openxmlformats.org/officeDocument/2006/relationships" id="256" r:id="R2bccbad2db374717"/>
+    <p:sldId xmlns:r="http://schemas.openxmlformats.org/officeDocument/2006/relationships" id="257" r:id="R99afc898dd3246c9"/>
+    <p:sldId xmlns:r="http://schemas.openxmlformats.org/officeDocument/2006/relationships" id="258" r:id="R5e6bffee6caa40dc"/>
+    <p:sldId xmlns:r="http://schemas.openxmlformats.org/officeDocument/2006/relationships" id="259" r:id="R464d836a51fa4f6c"/>
+    <p:sldId xmlns:r="http://schemas.openxmlformats.org/officeDocument/2006/relationships" id="260" r:id="Rb65640e0042d49a1"/>
   </p:sldIdLst>
   <p:sldSz cx="12192000" cy="6858000"/>
   <p:notesSz cx="6858000" cy="9144000"/>
   <p:embeddedFontLst>
     <p:embeddedFont>
       <p:font typeface="JetBrains Mono"/>
-      <p:regular xmlns:r="http://schemas.openxmlformats.org/officeDocument/2006/relationships" r:id="R615b236da2374553"/>
+      <p:regular xmlns:r="http://schemas.openxmlformats.org/officeDocument/2006/relationships" r:id="Rd52d2302d0d14c49"/>
     </p:embeddedFont>
   </p:embeddedFontLst>
 </p:presentation>
@@ -1052,7 +1052,7 @@
           <p:nvPr/>
         </p:nvPicPr>
         <p:blipFill rotWithShape="1">
-          <a:blip xmlns:r="http://schemas.openxmlformats.org/officeDocument/2006/relationships" xmlns:a="http://schemas.openxmlformats.org/drawingml/2006/main" r:embed="R6cff7ff816064e49"/>
+          <a:blip xmlns:r="http://schemas.openxmlformats.org/officeDocument/2006/relationships" xmlns:a="http://schemas.openxmlformats.org/drawingml/2006/main" r:embed="R30729d4b1b054c0f"/>
           <a:stretch xmlns:a="http://schemas.openxmlformats.org/drawingml/2006/main"/>
         </p:blipFill>
         <p:spPr>
@@ -1253,7 +1253,7 @@
           <p:nvPr/>
         </p:nvPicPr>
         <p:blipFill rotWithShape="1">
-          <a:blip xmlns:r="http://schemas.openxmlformats.org/officeDocument/2006/relationships" xmlns:a="http://schemas.openxmlformats.org/drawingml/2006/main" r:embed="R24875b22103f457d">
+          <a:blip xmlns:r="http://schemas.openxmlformats.org/officeDocument/2006/relationships" xmlns:a="http://schemas.openxmlformats.org/drawingml/2006/main" r:embed="R2e8c594f2abe4dae">
             <a:alphaModFix amt="28000"/>
           </a:blip>
           <a:stretch xmlns:a="http://schemas.openxmlformats.org/drawingml/2006/main"/>
@@ -1466,7 +1466,7 @@
           <p:nvPr/>
         </p:nvPicPr>
         <p:blipFill rotWithShape="1">
-          <a:blip xmlns:r="http://schemas.openxmlformats.org/officeDocument/2006/relationships" xmlns:a="http://schemas.openxmlformats.org/drawingml/2006/main" r:embed="R330e5ac1e93c472d">
+          <a:blip xmlns:r="http://schemas.openxmlformats.org/officeDocument/2006/relationships" xmlns:a="http://schemas.openxmlformats.org/drawingml/2006/main" r:embed="R2563644f353c422b">
             <a:alphaModFix amt="28000"/>
           </a:blip>
           <a:stretch xmlns:a="http://schemas.openxmlformats.org/drawingml/2006/main"/>
@@ -1701,7 +1701,7 @@
           <p:nvPr/>
         </p:nvPicPr>
         <p:blipFill rotWithShape="1">
-          <a:blip xmlns:r="http://schemas.openxmlformats.org/officeDocument/2006/relationships" xmlns:a="http://schemas.openxmlformats.org/drawingml/2006/main" r:embed="Re6c753b9d6e54d3f">
+          <a:blip xmlns:r="http://schemas.openxmlformats.org/officeDocument/2006/relationships" xmlns:a="http://schemas.openxmlformats.org/drawingml/2006/main" r:embed="R15cbba1c17684e30">
             <a:alphaModFix amt="28000"/>
           </a:blip>
           <a:stretch xmlns:a="http://schemas.openxmlformats.org/drawingml/2006/main"/>
@@ -1978,7 +1978,7 @@
           <p:nvPr/>
         </p:nvPicPr>
         <p:blipFill rotWithShape="1">
-          <a:blip xmlns:r="http://schemas.openxmlformats.org/officeDocument/2006/relationships" xmlns:a="http://schemas.openxmlformats.org/drawingml/2006/main" r:embed="R53ad0b9a22b14eb9">
+          <a:blip xmlns:r="http://schemas.openxmlformats.org/officeDocument/2006/relationships" xmlns:a="http://schemas.openxmlformats.org/drawingml/2006/main" r:embed="Rbdf5af70f24142a5">
             <a:alphaModFix amt="28000"/>
           </a:blip>
           <a:stretch xmlns:a="http://schemas.openxmlformats.org/drawingml/2006/main"/>
@@ -2253,7 +2253,7 @@
           <p:nvPr/>
         </p:nvPicPr>
         <p:blipFill rotWithShape="1">
-          <a:blip xmlns:r="http://schemas.openxmlformats.org/officeDocument/2006/relationships" xmlns:a="http://schemas.openxmlformats.org/drawingml/2006/main" r:embed="R5dc64f82dbce4eef">
+          <a:blip xmlns:r="http://schemas.openxmlformats.org/officeDocument/2006/relationships" xmlns:a="http://schemas.openxmlformats.org/drawingml/2006/main" r:embed="R40ff1448d8d3430c">
             <a:alphaModFix amt="28000"/>
           </a:blip>
           <a:stretch xmlns:a="http://schemas.openxmlformats.org/drawingml/2006/main"/>
@@ -2677,7 +2677,7 @@
           <p:nvPr/>
         </p:nvPicPr>
         <p:blipFill rotWithShape="1">
-          <a:blip xmlns:r="http://schemas.openxmlformats.org/officeDocument/2006/relationships" xmlns:a="http://schemas.openxmlformats.org/drawingml/2006/main" r:embed="R1344e1ce8abd4546">
+          <a:blip xmlns:r="http://schemas.openxmlformats.org/officeDocument/2006/relationships" xmlns:a="http://schemas.openxmlformats.org/drawingml/2006/main" r:embed="R8ce8eafbd60646de">
             <a:alphaModFix amt="28000"/>
           </a:blip>
           <a:stretch xmlns:a="http://schemas.openxmlformats.org/drawingml/2006/main"/>
@@ -2818,7 +2818,7 @@
           <p:nvPr/>
         </p:nvPicPr>
         <p:blipFill rotWithShape="1">
-          <a:blip xmlns:r="http://schemas.openxmlformats.org/officeDocument/2006/relationships" xmlns:a="http://schemas.openxmlformats.org/drawingml/2006/main" r:embed="Re154be8560ea439e">
+          <a:blip xmlns:r="http://schemas.openxmlformats.org/officeDocument/2006/relationships" xmlns:a="http://schemas.openxmlformats.org/drawingml/2006/main" r:embed="R9cfcbb7e8f4e4b18">
             <a:alphaModFix amt="28000"/>
           </a:blip>
           <a:stretch xmlns:a="http://schemas.openxmlformats.org/drawingml/2006/main"/>
@@ -2932,7 +2932,7 @@
           <p:nvPr/>
         </p:nvPicPr>
         <p:blipFill rotWithShape="1">
-          <a:blip xmlns:r="http://schemas.openxmlformats.org/officeDocument/2006/relationships" xmlns:a="http://schemas.openxmlformats.org/drawingml/2006/main" r:embed="Rac009d54a0fe4b32">
+          <a:blip xmlns:r="http://schemas.openxmlformats.org/officeDocument/2006/relationships" xmlns:a="http://schemas.openxmlformats.org/drawingml/2006/main" r:embed="R42cae37597b9477f">
             <a:alphaModFix amt="28000"/>
           </a:blip>
           <a:stretch xmlns:a="http://schemas.openxmlformats.org/drawingml/2006/main"/>
@@ -3259,7 +3259,7 @@
           <p:nvPr/>
         </p:nvPicPr>
         <p:blipFill rotWithShape="1">
-          <a:blip xmlns:r="http://schemas.openxmlformats.org/officeDocument/2006/relationships" xmlns:a="http://schemas.openxmlformats.org/drawingml/2006/main" r:embed="R26d84e668988442d">
+          <a:blip xmlns:r="http://schemas.openxmlformats.org/officeDocument/2006/relationships" xmlns:a="http://schemas.openxmlformats.org/drawingml/2006/main" r:embed="Ra7da2724a6234571">
             <a:alphaModFix amt="28000"/>
           </a:blip>
           <a:stretch xmlns:a="http://schemas.openxmlformats.org/drawingml/2006/main"/>
@@ -3547,7 +3547,7 @@
           <p:nvPr/>
         </p:nvPicPr>
         <p:blipFill rotWithShape="1">
-          <a:blip xmlns:r="http://schemas.openxmlformats.org/officeDocument/2006/relationships" xmlns:a="http://schemas.openxmlformats.org/drawingml/2006/main" r:embed="R1186e2351f86442a">
+          <a:blip xmlns:r="http://schemas.openxmlformats.org/officeDocument/2006/relationships" xmlns:a="http://schemas.openxmlformats.org/drawingml/2006/main" r:embed="Rf9bf9d41d0a64cce">
             <a:alphaModFix amt="28000"/>
           </a:blip>
           <a:stretch xmlns:a="http://schemas.openxmlformats.org/drawingml/2006/main"/>
@@ -3784,17 +3784,17 @@
   </p:cSld>
   <p:clrMap bg1="lt1" tx1="dk1" bg2="lt2" tx2="dk2" accent1="accent1" accent2="accent2" accent3="accent3" accent4="accent4" accent5="accent5" accent6="accent6" hlink="hlink" folHlink="folHlink"/>
   <p:sldLayoutIdLst>
-    <p:sldLayoutId xmlns:r="http://schemas.openxmlformats.org/officeDocument/2006/relationships" id="2147483649" r:id="R7ef10cfc814241f7"/>
-    <p:sldLayoutId xmlns:r="http://schemas.openxmlformats.org/officeDocument/2006/relationships" id="2147483650" r:id="R6ff25ccad3b4467a"/>
-    <p:sldLayoutId xmlns:r="http://schemas.openxmlformats.org/officeDocument/2006/relationships" id="2147483651" r:id="R1a6ca81969894185"/>
-    <p:sldLayoutId xmlns:r="http://schemas.openxmlformats.org/officeDocument/2006/relationships" id="2147483652" r:id="R074cb520c19f4327"/>
-    <p:sldLayoutId xmlns:r="http://schemas.openxmlformats.org/officeDocument/2006/relationships" id="2147483653" r:id="Ra21a9eea44de46eb"/>
-    <p:sldLayoutId xmlns:r="http://schemas.openxmlformats.org/officeDocument/2006/relationships" id="2147483654" r:id="R5cb93a8541ce4711"/>
-    <p:sldLayoutId xmlns:r="http://schemas.openxmlformats.org/officeDocument/2006/relationships" id="2147483655" r:id="R723872d3794b4b9c"/>
-    <p:sldLayoutId xmlns:r="http://schemas.openxmlformats.org/officeDocument/2006/relationships" id="2147483656" r:id="R8150d5a36aad4c6b"/>
-    <p:sldLayoutId xmlns:r="http://schemas.openxmlformats.org/officeDocument/2006/relationships" id="2147483657" r:id="Rd1f7a8288cfa4dff"/>
-    <p:sldLayoutId xmlns:r="http://schemas.openxmlformats.org/officeDocument/2006/relationships" id="2147483658" r:id="R1d2a0c9cb02b4f1c"/>
-    <p:sldLayoutId xmlns:r="http://schemas.openxmlformats.org/officeDocument/2006/relationships" id="2147483659" r:id="R95cd3508c75b4c0c"/>
+    <p:sldLayoutId xmlns:r="http://schemas.openxmlformats.org/officeDocument/2006/relationships" id="2147483649" r:id="Rad4e9ea36d044374"/>
+    <p:sldLayoutId xmlns:r="http://schemas.openxmlformats.org/officeDocument/2006/relationships" id="2147483650" r:id="R5620f50fbc064bdb"/>
+    <p:sldLayoutId xmlns:r="http://schemas.openxmlformats.org/officeDocument/2006/relationships" id="2147483651" r:id="Raac98a2ac9cc4d07"/>
+    <p:sldLayoutId xmlns:r="http://schemas.openxmlformats.org/officeDocument/2006/relationships" id="2147483652" r:id="R86577b2808ac48f7"/>
+    <p:sldLayoutId xmlns:r="http://schemas.openxmlformats.org/officeDocument/2006/relationships" id="2147483653" r:id="R7e1d3be40f604270"/>
+    <p:sldLayoutId xmlns:r="http://schemas.openxmlformats.org/officeDocument/2006/relationships" id="2147483654" r:id="Ra7e42cfc92334eb6"/>
+    <p:sldLayoutId xmlns:r="http://schemas.openxmlformats.org/officeDocument/2006/relationships" id="2147483655" r:id="R5512a0dcccb4482c"/>
+    <p:sldLayoutId xmlns:r="http://schemas.openxmlformats.org/officeDocument/2006/relationships" id="2147483656" r:id="Ra2174584661b40d0"/>
+    <p:sldLayoutId xmlns:r="http://schemas.openxmlformats.org/officeDocument/2006/relationships" id="2147483657" r:id="R2b7f779c3278467d"/>
+    <p:sldLayoutId xmlns:r="http://schemas.openxmlformats.org/officeDocument/2006/relationships" id="2147483658" r:id="Raa93746544dd49a7"/>
+    <p:sldLayoutId xmlns:r="http://schemas.openxmlformats.org/officeDocument/2006/relationships" id="2147483659" r:id="R846f5bc6c001444a"/>
   </p:sldLayoutIdLst>
   <p:hf hdr="0" ftr="0" dt="0"/>
   <p:txStyles>
@@ -6350,29 +6350,7 @@
                 <a:ea typeface="Calibri"/>
                 <a:cs typeface="Calibri"/>
               </a:rPr>
-              <a:t>. For anything </a:t>
-            </a:r>
-            <a:r>
-              <a:rPr sz="1550" b="0">
-                <a:solidFill>
-                  <a:srgbClr val="C45E00"/>
-                </a:solidFill>
-                <a:latin typeface="JetBrains Mono"/>
-                <a:ea typeface="JetBrains Mono"/>
-                <a:cs typeface="JetBrains Mono"/>
-              </a:rPr>
-              <a:t>else</a:t>
-            </a:r>
-            <a:r>
-              <a:rPr sz="1800" b="0">
-                <a:solidFill>
-                  <a:srgbClr val="080808"/>
-                </a:solidFill>
-                <a:latin typeface="Calibri"/>
-                <a:ea typeface="Calibri"/>
-                <a:cs typeface="Calibri"/>
-              </a:rPr>
-              <a:t>, display </a:t>
+              <a:t>. For anything else, display </a:t>
             </a:r>
             <a:r>
               <a:rPr sz="1550" b="0">

--- a/Mapped Curriculum Lessons/Grade 8/Lesson 36 - School Club Manager/School Club Manager - Slides.pptx
+++ b/Mapped Curriculum Lessons/Grade 8/Lesson 36 - School Club Manager/School Club Manager - Slides.pptx
@@ -2,24 +2,24 @@
 <file path=ppt/presentation.xml><?xml version="1.0" encoding="utf-8"?>
 <p:presentation xmlns:p="http://schemas.openxmlformats.org/presentationml/2006/main" embedTrueTypeFonts="1" saveSubsetFonts="0">
   <p:sldMasterIdLst>
-    <p:sldMasterId xmlns:r="http://schemas.openxmlformats.org/officeDocument/2006/relationships" id="2147483648" r:id="R338faf933ae546b4"/>
+    <p:sldMasterId xmlns:r="http://schemas.openxmlformats.org/officeDocument/2006/relationships" id="2147483648" r:id="Rb459c2e1b9334a1a"/>
   </p:sldMasterIdLst>
   <p:notesMasterIdLst>
-    <p:notesMasterId xmlns:r="http://schemas.openxmlformats.org/officeDocument/2006/relationships" r:id="R0cd9905323bb4c8f"/>
+    <p:notesMasterId xmlns:r="http://schemas.openxmlformats.org/officeDocument/2006/relationships" r:id="Rb0d9b4165c194dc9"/>
   </p:notesMasterIdLst>
   <p:sldIdLst>
-    <p:sldId xmlns:r="http://schemas.openxmlformats.org/officeDocument/2006/relationships" id="256" r:id="R2bccbad2db374717"/>
-    <p:sldId xmlns:r="http://schemas.openxmlformats.org/officeDocument/2006/relationships" id="257" r:id="R99afc898dd3246c9"/>
-    <p:sldId xmlns:r="http://schemas.openxmlformats.org/officeDocument/2006/relationships" id="258" r:id="R5e6bffee6caa40dc"/>
-    <p:sldId xmlns:r="http://schemas.openxmlformats.org/officeDocument/2006/relationships" id="259" r:id="R464d836a51fa4f6c"/>
-    <p:sldId xmlns:r="http://schemas.openxmlformats.org/officeDocument/2006/relationships" id="260" r:id="Rb65640e0042d49a1"/>
+    <p:sldId xmlns:r="http://schemas.openxmlformats.org/officeDocument/2006/relationships" id="256" r:id="Rb529bbb116754cc9"/>
+    <p:sldId xmlns:r="http://schemas.openxmlformats.org/officeDocument/2006/relationships" id="257" r:id="R6f33a0f21bde48b0"/>
+    <p:sldId xmlns:r="http://schemas.openxmlformats.org/officeDocument/2006/relationships" id="258" r:id="R74cabcdf042c4181"/>
+    <p:sldId xmlns:r="http://schemas.openxmlformats.org/officeDocument/2006/relationships" id="259" r:id="R953cbdc698074cdd"/>
+    <p:sldId xmlns:r="http://schemas.openxmlformats.org/officeDocument/2006/relationships" id="260" r:id="Rbba13353639f49e6"/>
   </p:sldIdLst>
   <p:sldSz cx="12192000" cy="6858000"/>
   <p:notesSz cx="6858000" cy="9144000"/>
   <p:embeddedFontLst>
     <p:embeddedFont>
       <p:font typeface="JetBrains Mono"/>
-      <p:regular xmlns:r="http://schemas.openxmlformats.org/officeDocument/2006/relationships" r:id="Rd52d2302d0d14c49"/>
+      <p:regular xmlns:r="http://schemas.openxmlformats.org/officeDocument/2006/relationships" r:id="Re2f423519e0f48f3"/>
     </p:embeddedFont>
   </p:embeddedFontLst>
 </p:presentation>
@@ -1052,7 +1052,7 @@
           <p:nvPr/>
         </p:nvPicPr>
         <p:blipFill rotWithShape="1">
-          <a:blip xmlns:r="http://schemas.openxmlformats.org/officeDocument/2006/relationships" xmlns:a="http://schemas.openxmlformats.org/drawingml/2006/main" r:embed="R30729d4b1b054c0f"/>
+          <a:blip xmlns:r="http://schemas.openxmlformats.org/officeDocument/2006/relationships" xmlns:a="http://schemas.openxmlformats.org/drawingml/2006/main" r:embed="Rb125acb91a1045ca"/>
           <a:stretch xmlns:a="http://schemas.openxmlformats.org/drawingml/2006/main"/>
         </p:blipFill>
         <p:spPr>
@@ -1253,7 +1253,7 @@
           <p:nvPr/>
         </p:nvPicPr>
         <p:blipFill rotWithShape="1">
-          <a:blip xmlns:r="http://schemas.openxmlformats.org/officeDocument/2006/relationships" xmlns:a="http://schemas.openxmlformats.org/drawingml/2006/main" r:embed="R2e8c594f2abe4dae">
+          <a:blip xmlns:r="http://schemas.openxmlformats.org/officeDocument/2006/relationships" xmlns:a="http://schemas.openxmlformats.org/drawingml/2006/main" r:embed="R91fceb869c1a4769">
             <a:alphaModFix amt="28000"/>
           </a:blip>
           <a:stretch xmlns:a="http://schemas.openxmlformats.org/drawingml/2006/main"/>
@@ -1466,7 +1466,7 @@
           <p:nvPr/>
         </p:nvPicPr>
         <p:blipFill rotWithShape="1">
-          <a:blip xmlns:r="http://schemas.openxmlformats.org/officeDocument/2006/relationships" xmlns:a="http://schemas.openxmlformats.org/drawingml/2006/main" r:embed="R2563644f353c422b">
+          <a:blip xmlns:r="http://schemas.openxmlformats.org/officeDocument/2006/relationships" xmlns:a="http://schemas.openxmlformats.org/drawingml/2006/main" r:embed="R797c95ad23784dff">
             <a:alphaModFix amt="28000"/>
           </a:blip>
           <a:stretch xmlns:a="http://schemas.openxmlformats.org/drawingml/2006/main"/>
@@ -1701,7 +1701,7 @@
           <p:nvPr/>
         </p:nvPicPr>
         <p:blipFill rotWithShape="1">
-          <a:blip xmlns:r="http://schemas.openxmlformats.org/officeDocument/2006/relationships" xmlns:a="http://schemas.openxmlformats.org/drawingml/2006/main" r:embed="R15cbba1c17684e30">
+          <a:blip xmlns:r="http://schemas.openxmlformats.org/officeDocument/2006/relationships" xmlns:a="http://schemas.openxmlformats.org/drawingml/2006/main" r:embed="Rb29fde28488c4f5a">
             <a:alphaModFix amt="28000"/>
           </a:blip>
           <a:stretch xmlns:a="http://schemas.openxmlformats.org/drawingml/2006/main"/>
@@ -1978,7 +1978,7 @@
           <p:nvPr/>
         </p:nvPicPr>
         <p:blipFill rotWithShape="1">
-          <a:blip xmlns:r="http://schemas.openxmlformats.org/officeDocument/2006/relationships" xmlns:a="http://schemas.openxmlformats.org/drawingml/2006/main" r:embed="Rbdf5af70f24142a5">
+          <a:blip xmlns:r="http://schemas.openxmlformats.org/officeDocument/2006/relationships" xmlns:a="http://schemas.openxmlformats.org/drawingml/2006/main" r:embed="R904a7b18efcd4c76">
             <a:alphaModFix amt="28000"/>
           </a:blip>
           <a:stretch xmlns:a="http://schemas.openxmlformats.org/drawingml/2006/main"/>
@@ -2253,7 +2253,7 @@
           <p:nvPr/>
         </p:nvPicPr>
         <p:blipFill rotWithShape="1">
-          <a:blip xmlns:r="http://schemas.openxmlformats.org/officeDocument/2006/relationships" xmlns:a="http://schemas.openxmlformats.org/drawingml/2006/main" r:embed="R40ff1448d8d3430c">
+          <a:blip xmlns:r="http://schemas.openxmlformats.org/officeDocument/2006/relationships" xmlns:a="http://schemas.openxmlformats.org/drawingml/2006/main" r:embed="R0f1b8f80b2ee4b34">
             <a:alphaModFix amt="28000"/>
           </a:blip>
           <a:stretch xmlns:a="http://schemas.openxmlformats.org/drawingml/2006/main"/>
@@ -2677,7 +2677,7 @@
           <p:nvPr/>
         </p:nvPicPr>
         <p:blipFill rotWithShape="1">
-          <a:blip xmlns:r="http://schemas.openxmlformats.org/officeDocument/2006/relationships" xmlns:a="http://schemas.openxmlformats.org/drawingml/2006/main" r:embed="R8ce8eafbd60646de">
+          <a:blip xmlns:r="http://schemas.openxmlformats.org/officeDocument/2006/relationships" xmlns:a="http://schemas.openxmlformats.org/drawingml/2006/main" r:embed="R3a102b59b59c40dd">
             <a:alphaModFix amt="28000"/>
           </a:blip>
           <a:stretch xmlns:a="http://schemas.openxmlformats.org/drawingml/2006/main"/>
@@ -2818,7 +2818,7 @@
           <p:nvPr/>
         </p:nvPicPr>
         <p:blipFill rotWithShape="1">
-          <a:blip xmlns:r="http://schemas.openxmlformats.org/officeDocument/2006/relationships" xmlns:a="http://schemas.openxmlformats.org/drawingml/2006/main" r:embed="R9cfcbb7e8f4e4b18">
+          <a:blip xmlns:r="http://schemas.openxmlformats.org/officeDocument/2006/relationships" xmlns:a="http://schemas.openxmlformats.org/drawingml/2006/main" r:embed="Rdada6758f5fe49c9">
             <a:alphaModFix amt="28000"/>
           </a:blip>
           <a:stretch xmlns:a="http://schemas.openxmlformats.org/drawingml/2006/main"/>
@@ -2932,7 +2932,7 @@
           <p:nvPr/>
         </p:nvPicPr>
         <p:blipFill rotWithShape="1">
-          <a:blip xmlns:r="http://schemas.openxmlformats.org/officeDocument/2006/relationships" xmlns:a="http://schemas.openxmlformats.org/drawingml/2006/main" r:embed="R42cae37597b9477f">
+          <a:blip xmlns:r="http://schemas.openxmlformats.org/officeDocument/2006/relationships" xmlns:a="http://schemas.openxmlformats.org/drawingml/2006/main" r:embed="Rf2f4d04f00d64407">
             <a:alphaModFix amt="28000"/>
           </a:blip>
           <a:stretch xmlns:a="http://schemas.openxmlformats.org/drawingml/2006/main"/>
@@ -3259,7 +3259,7 @@
           <p:nvPr/>
         </p:nvPicPr>
         <p:blipFill rotWithShape="1">
-          <a:blip xmlns:r="http://schemas.openxmlformats.org/officeDocument/2006/relationships" xmlns:a="http://schemas.openxmlformats.org/drawingml/2006/main" r:embed="Ra7da2724a6234571">
+          <a:blip xmlns:r="http://schemas.openxmlformats.org/officeDocument/2006/relationships" xmlns:a="http://schemas.openxmlformats.org/drawingml/2006/main" r:embed="Rc030e6cede3b4ece">
             <a:alphaModFix amt="28000"/>
           </a:blip>
           <a:stretch xmlns:a="http://schemas.openxmlformats.org/drawingml/2006/main"/>
@@ -3547,7 +3547,7 @@
           <p:nvPr/>
         </p:nvPicPr>
         <p:blipFill rotWithShape="1">
-          <a:blip xmlns:r="http://schemas.openxmlformats.org/officeDocument/2006/relationships" xmlns:a="http://schemas.openxmlformats.org/drawingml/2006/main" r:embed="Rf9bf9d41d0a64cce">
+          <a:blip xmlns:r="http://schemas.openxmlformats.org/officeDocument/2006/relationships" xmlns:a="http://schemas.openxmlformats.org/drawingml/2006/main" r:embed="R343c1460aff34773">
             <a:alphaModFix amt="28000"/>
           </a:blip>
           <a:stretch xmlns:a="http://schemas.openxmlformats.org/drawingml/2006/main"/>
@@ -3784,17 +3784,17 @@
   </p:cSld>
   <p:clrMap bg1="lt1" tx1="dk1" bg2="lt2" tx2="dk2" accent1="accent1" accent2="accent2" accent3="accent3" accent4="accent4" accent5="accent5" accent6="accent6" hlink="hlink" folHlink="folHlink"/>
   <p:sldLayoutIdLst>
-    <p:sldLayoutId xmlns:r="http://schemas.openxmlformats.org/officeDocument/2006/relationships" id="2147483649" r:id="Rad4e9ea36d044374"/>
-    <p:sldLayoutId xmlns:r="http://schemas.openxmlformats.org/officeDocument/2006/relationships" id="2147483650" r:id="R5620f50fbc064bdb"/>
-    <p:sldLayoutId xmlns:r="http://schemas.openxmlformats.org/officeDocument/2006/relationships" id="2147483651" r:id="Raac98a2ac9cc4d07"/>
-    <p:sldLayoutId xmlns:r="http://schemas.openxmlformats.org/officeDocument/2006/relationships" id="2147483652" r:id="R86577b2808ac48f7"/>
-    <p:sldLayoutId xmlns:r="http://schemas.openxmlformats.org/officeDocument/2006/relationships" id="2147483653" r:id="R7e1d3be40f604270"/>
-    <p:sldLayoutId xmlns:r="http://schemas.openxmlformats.org/officeDocument/2006/relationships" id="2147483654" r:id="Ra7e42cfc92334eb6"/>
-    <p:sldLayoutId xmlns:r="http://schemas.openxmlformats.org/officeDocument/2006/relationships" id="2147483655" r:id="R5512a0dcccb4482c"/>
-    <p:sldLayoutId xmlns:r="http://schemas.openxmlformats.org/officeDocument/2006/relationships" id="2147483656" r:id="Ra2174584661b40d0"/>
-    <p:sldLayoutId xmlns:r="http://schemas.openxmlformats.org/officeDocument/2006/relationships" id="2147483657" r:id="R2b7f779c3278467d"/>
-    <p:sldLayoutId xmlns:r="http://schemas.openxmlformats.org/officeDocument/2006/relationships" id="2147483658" r:id="Raa93746544dd49a7"/>
-    <p:sldLayoutId xmlns:r="http://schemas.openxmlformats.org/officeDocument/2006/relationships" id="2147483659" r:id="R846f5bc6c001444a"/>
+    <p:sldLayoutId xmlns:r="http://schemas.openxmlformats.org/officeDocument/2006/relationships" id="2147483649" r:id="R159dcfc0367546d8"/>
+    <p:sldLayoutId xmlns:r="http://schemas.openxmlformats.org/officeDocument/2006/relationships" id="2147483650" r:id="Re7bdff822e7f44a7"/>
+    <p:sldLayoutId xmlns:r="http://schemas.openxmlformats.org/officeDocument/2006/relationships" id="2147483651" r:id="Re77e1026753548ab"/>
+    <p:sldLayoutId xmlns:r="http://schemas.openxmlformats.org/officeDocument/2006/relationships" id="2147483652" r:id="R4e85054019c643fb"/>
+    <p:sldLayoutId xmlns:r="http://schemas.openxmlformats.org/officeDocument/2006/relationships" id="2147483653" r:id="R51b99c0b8cb243d2"/>
+    <p:sldLayoutId xmlns:r="http://schemas.openxmlformats.org/officeDocument/2006/relationships" id="2147483654" r:id="Rcda524cd58df44d8"/>
+    <p:sldLayoutId xmlns:r="http://schemas.openxmlformats.org/officeDocument/2006/relationships" id="2147483655" r:id="Rd41fd61877964ef6"/>
+    <p:sldLayoutId xmlns:r="http://schemas.openxmlformats.org/officeDocument/2006/relationships" id="2147483656" r:id="R07fac4acd7814e78"/>
+    <p:sldLayoutId xmlns:r="http://schemas.openxmlformats.org/officeDocument/2006/relationships" id="2147483657" r:id="R3e5c104057a94452"/>
+    <p:sldLayoutId xmlns:r="http://schemas.openxmlformats.org/officeDocument/2006/relationships" id="2147483658" r:id="R01faa08554104799"/>
+    <p:sldLayoutId xmlns:r="http://schemas.openxmlformats.org/officeDocument/2006/relationships" id="2147483659" r:id="Rf5ca2a520e9d40c5"/>
   </p:sldLayoutIdLst>
   <p:hf hdr="0" ftr="0" dt="0"/>
   <p:txStyles>
